--- a/pycon/handmade.pptx
+++ b/pycon/handmade.pptx
@@ -263,7 +263,7 @@
           <a:p>
             <a:fld id="{E1445870-A77A-407B-ACBB-37BE9E56C888}" type="datetimeFigureOut">
               <a:rPr kumimoji="1" lang="ja-JP" altLang="en-US" smtClean="0"/>
-              <a:t>2026/3/22</a:t>
+              <a:t>2026/3/29</a:t>
             </a:fld>
             <a:endParaRPr kumimoji="1" lang="ja-JP" altLang="en-US"/>
           </a:p>
@@ -493,7 +493,7 @@
           <a:p>
             <a:fld id="{E1445870-A77A-407B-ACBB-37BE9E56C888}" type="datetimeFigureOut">
               <a:rPr kumimoji="1" lang="ja-JP" altLang="en-US" smtClean="0"/>
-              <a:t>2026/3/22</a:t>
+              <a:t>2026/3/29</a:t>
             </a:fld>
             <a:endParaRPr kumimoji="1" lang="ja-JP" altLang="en-US"/>
           </a:p>
@@ -733,7 +733,7 @@
           <a:p>
             <a:fld id="{E1445870-A77A-407B-ACBB-37BE9E56C888}" type="datetimeFigureOut">
               <a:rPr kumimoji="1" lang="ja-JP" altLang="en-US" smtClean="0"/>
-              <a:t>2026/3/22</a:t>
+              <a:t>2026/3/29</a:t>
             </a:fld>
             <a:endParaRPr kumimoji="1" lang="ja-JP" altLang="en-US"/>
           </a:p>
@@ -963,7 +963,7 @@
           <a:p>
             <a:fld id="{E1445870-A77A-407B-ACBB-37BE9E56C888}" type="datetimeFigureOut">
               <a:rPr kumimoji="1" lang="ja-JP" altLang="en-US" smtClean="0"/>
-              <a:t>2026/3/22</a:t>
+              <a:t>2026/3/29</a:t>
             </a:fld>
             <a:endParaRPr kumimoji="1" lang="ja-JP" altLang="en-US"/>
           </a:p>
@@ -1238,7 +1238,7 @@
           <a:p>
             <a:fld id="{E1445870-A77A-407B-ACBB-37BE9E56C888}" type="datetimeFigureOut">
               <a:rPr kumimoji="1" lang="ja-JP" altLang="en-US" smtClean="0"/>
-              <a:t>2026/3/22</a:t>
+              <a:t>2026/3/29</a:t>
             </a:fld>
             <a:endParaRPr kumimoji="1" lang="ja-JP" altLang="en-US"/>
           </a:p>
@@ -1567,7 +1567,7 @@
           <a:p>
             <a:fld id="{E1445870-A77A-407B-ACBB-37BE9E56C888}" type="datetimeFigureOut">
               <a:rPr kumimoji="1" lang="ja-JP" altLang="en-US" smtClean="0"/>
-              <a:t>2026/3/22</a:t>
+              <a:t>2026/3/29</a:t>
             </a:fld>
             <a:endParaRPr kumimoji="1" lang="ja-JP" altLang="en-US"/>
           </a:p>
@@ -2043,7 +2043,7 @@
           <a:p>
             <a:fld id="{E1445870-A77A-407B-ACBB-37BE9E56C888}" type="datetimeFigureOut">
               <a:rPr kumimoji="1" lang="ja-JP" altLang="en-US" smtClean="0"/>
-              <a:t>2026/3/22</a:t>
+              <a:t>2026/3/29</a:t>
             </a:fld>
             <a:endParaRPr kumimoji="1" lang="ja-JP" altLang="en-US"/>
           </a:p>
@@ -2184,7 +2184,7 @@
           <a:p>
             <a:fld id="{E1445870-A77A-407B-ACBB-37BE9E56C888}" type="datetimeFigureOut">
               <a:rPr kumimoji="1" lang="ja-JP" altLang="en-US" smtClean="0"/>
-              <a:t>2026/3/22</a:t>
+              <a:t>2026/3/29</a:t>
             </a:fld>
             <a:endParaRPr kumimoji="1" lang="ja-JP" altLang="en-US"/>
           </a:p>
@@ -2297,7 +2297,7 @@
           <a:p>
             <a:fld id="{E1445870-A77A-407B-ACBB-37BE9E56C888}" type="datetimeFigureOut">
               <a:rPr kumimoji="1" lang="ja-JP" altLang="en-US" smtClean="0"/>
-              <a:t>2026/3/22</a:t>
+              <a:t>2026/3/29</a:t>
             </a:fld>
             <a:endParaRPr kumimoji="1" lang="ja-JP" altLang="en-US"/>
           </a:p>
@@ -2640,7 +2640,7 @@
           <a:p>
             <a:fld id="{E1445870-A77A-407B-ACBB-37BE9E56C888}" type="datetimeFigureOut">
               <a:rPr kumimoji="1" lang="ja-JP" altLang="en-US" smtClean="0"/>
-              <a:t>2026/3/22</a:t>
+              <a:t>2026/3/29</a:t>
             </a:fld>
             <a:endParaRPr kumimoji="1" lang="ja-JP" altLang="en-US"/>
           </a:p>
@@ -2928,7 +2928,7 @@
           <a:p>
             <a:fld id="{E1445870-A77A-407B-ACBB-37BE9E56C888}" type="datetimeFigureOut">
               <a:rPr kumimoji="1" lang="ja-JP" altLang="en-US" smtClean="0"/>
-              <a:t>2026/3/22</a:t>
+              <a:t>2026/3/29</a:t>
             </a:fld>
             <a:endParaRPr kumimoji="1" lang="ja-JP" altLang="en-US"/>
           </a:p>
@@ -3201,7 +3201,7 @@
           <a:p>
             <a:fld id="{E1445870-A77A-407B-ACBB-37BE9E56C888}" type="datetimeFigureOut">
               <a:rPr kumimoji="1" lang="ja-JP" altLang="en-US" smtClean="0"/>
-              <a:t>2026/3/22</a:t>
+              <a:t>2026/3/29</a:t>
             </a:fld>
             <a:endParaRPr kumimoji="1" lang="ja-JP" altLang="en-US"/>
           </a:p>
@@ -4028,8 +4028,8 @@
         </p:blipFill>
         <p:spPr>
           <a:xfrm>
-            <a:off x="2496000" y="1539000"/>
-            <a:ext cx="7200000" cy="3780000"/>
+            <a:off x="380571" y="428400"/>
+            <a:ext cx="11430857" cy="6001200"/>
           </a:xfrm>
           <a:prstGeom prst="rect">
             <a:avLst/>
